--- a/public/fun/pack/pptx/newspro/카드뉴스프리미엄_24_감사·칭찬_코랄샌드.pptx
+++ b/public/fun/pack/pptx/newspro/카드뉴스프리미엄_24_감사·칭찬_코랄샌드.pptx
@@ -113,12 +113,12 @@
   <p:extLst>
     <p:ext uri="{521415D9-36F7-43E2-AB2F-B90AF26B5E84}">
       <p14:sectionLst xmlns:p14="http://schemas.microsoft.com/office/powerpoint/2010/main">
-        <p14:section name="시작" id="{300A0033-B6EE-46D4-9430-7BB49B1BB0CD}">
+        <p14:section name="시작" id="{F18D049E-B4A4-4619-9127-0C2C4A318BF9}">
           <p14:sldIdLst>
             <p14:sldId id="256"/>
           </p14:sldIdLst>
         </p14:section>
-        <p14:section name="본문" id="{EA22FAD4-7057-4A58-A96F-E74E1D30E407}">
+        <p14:section name="본문" id="{4673779D-DEFB-4F93-BC06-13EC07B8A9C4}">
           <p14:sldIdLst>
             <p14:sldId id="257"/>
             <p14:sldId id="258"/>
@@ -127,7 +127,7 @@
             <p14:sldId id="261"/>
           </p14:sldIdLst>
         </p14:section>
-        <p14:section name="마무리" id="{6860C190-DB2F-4B84-8EF2-50E14561736A}">
+        <p14:section name="마무리" id="{5A05DA30-2560-4B9E-9450-0E991BB02E4E}">
           <p14:sldIdLst>
             <p14:sldId id="262"/>
           </p14:sldIdLst>
@@ -1558,7 +1558,7 @@
             </a:lvl1pPr>
           </a:lstStyle>
           <a:p>
-            <a:fld id="{E5B1E51C-DCA3-43BE-A3E1-A9A62FB20498}" type="slidenum">
+            <a:fld id="{09151CA2-9EA6-49C9-9A46-78A70DCD2673}" type="slidenum">
               <a:rPr lang="en-US"/>
               <a:t>‹#›</a:t>
             </a:fld>
@@ -2271,7 +2271,7 @@
             </a:lvl1pPr>
           </a:lstStyle>
           <a:p>
-            <a:fld id="{66DABFCA-1757-4F66-B7CD-7ED00FF0048F}" type="slidenum">
+            <a:fld id="{7DA1EB6E-5FBC-49FE-A611-052BDEA5E649}" type="slidenum">
               <a:rPr lang="en-US"/>
               <a:t>‹#›</a:t>
             </a:fld>
@@ -2941,7 +2941,7 @@
             </a:lvl1pPr>
           </a:lstStyle>
           <a:p>
-            <a:fld id="{7FECDB22-7F01-4248-920A-5AB04E08246C}" type="slidenum">
+            <a:fld id="{03984ED7-CB27-4805-8F70-CFDC5CBF00FD}" type="slidenum">
               <a:rPr lang="en-US"/>
               <a:t>‹#›</a:t>
             </a:fld>
@@ -3889,7 +3889,7 @@
           <a:bodyPr/>
           <a:lstStyle/>
           <a:p>
-            <a:fld id="{DB049114-0544-4A4E-AE66-29D4D902C0A9}" type="slidenum">
+            <a:fld id="{3B98F474-3C01-411D-AF84-0B78B261D3D7}" type="slidenum">
               <a:rPr lang="en-US"/>
               <a:t>‹#›</a:t>
             </a:fld>
@@ -4055,7 +4055,7 @@
           <a:bodyPr/>
           <a:lstStyle/>
           <a:p>
-            <a:fld id="{E80AE68B-B4DE-490D-8DE4-4637FC6C13EE}" type="slidenum">
+            <a:fld id="{A331EC26-7D4B-43F3-BF7A-740488BAA918}" type="slidenum">
               <a:rPr lang="en-US"/>
               <a:t>‹#›</a:t>
             </a:fld>
@@ -4221,7 +4221,7 @@
           <a:bodyPr/>
           <a:lstStyle/>
           <a:p>
-            <a:fld id="{A38CD1FC-BDF6-459D-99BD-7C745E4D3455}" type="slidenum">
+            <a:fld id="{5B822DB3-9DB2-4C3E-906E-02D69A3A3A8F}" type="slidenum">
               <a:rPr lang="en-US"/>
               <a:t>‹#›</a:t>
             </a:fld>
@@ -4387,7 +4387,7 @@
           <a:bodyPr/>
           <a:lstStyle/>
           <a:p>
-            <a:fld id="{4476DC91-26AF-4F01-A4F0-71CC6A6F29FB}" type="slidenum">
+            <a:fld id="{488F8F13-27D4-43CF-B8DE-BCF5C3898E22}" type="slidenum">
               <a:rPr lang="en-US"/>
               <a:t>‹#›</a:t>
             </a:fld>
@@ -4553,7 +4553,7 @@
           <a:bodyPr/>
           <a:lstStyle/>
           <a:p>
-            <a:fld id="{9986580F-8C35-4470-8A81-F20437EB7A63}" type="slidenum">
+            <a:fld id="{BEC2175C-41CB-4D1C-A48E-D94D9C2AA6D8}" type="slidenum">
               <a:rPr lang="en-US"/>
               <a:t>‹#›</a:t>
             </a:fld>
